--- a/docs/HandyCam_技法説明.pptx
+++ b/docs/HandyCam_技法説明.pptx
@@ -4421,7 +4421,7 @@
                 <a:ea typeface="Meiryo" pitchFamily="34" charset="-122"/>
                 <a:cs typeface="Meiryo" pitchFamily="34" charset="-120"/>
               </a:rPr>
-              <a:t>箱の色を周辺から推定して金属だけを抜き、内側輪郭(穴)を点集合にする</a:t>
+              <a:t>一番上の箱の内側矩形を検出 → 正面視に補正 → その内側で金属だけを抜き、内側輪郭(穴)を点集合にする</a:t>
             </a:r>
             <a:endParaRPr lang="en-US" sz="1000" dirty="0"/>
           </a:p>
@@ -4436,11 +4436,11 @@
         <p:spPr>
           <a:xfrm>
             <a:off x="6309360" y="3840480"/>
-            <a:ext cx="5303520" cy="2377440"/>
+            <a:ext cx="5303520" cy="1188720"/>
           </a:xfrm>
           <a:prstGeom prst="roundRect">
             <a:avLst>
-              <a:gd name="adj" fmla="val 3077"/>
+              <a:gd name="adj" fmla="val 6154"/>
             </a:avLst>
           </a:prstGeom>
           <a:solidFill>
@@ -4463,6 +4463,114 @@
         <p:spPr>
           <a:xfrm>
             <a:off x="6492240" y="3977640"/>
+            <a:ext cx="4937760" cy="365760"/>
+          </a:xfrm>
+          <a:prstGeom prst="rect">
+            <a:avLst/>
+          </a:prstGeom>
+          <a:noFill/>
+          <a:ln/>
+        </p:spPr>
+        <p:txBody>
+          <a:bodyPr wrap="square" lIns="0" tIns="0" rIns="0" bIns="0" rtlCol="0" anchor="ctr"/>
+          <a:lstStyle/>
+          <a:p>
+            <a:pPr indent="0" marL="0">
+              <a:buNone/>
+            </a:pPr>
+            <a:r>
+              <a:rPr lang="en-US" sz="1500" b="1" dirty="0">
+                <a:solidFill>
+                  <a:srgbClr val="0F3C63"/>
+                </a:solidFill>
+                <a:latin typeface="Meiryo" pitchFamily="34" charset="0"/>
+                <a:ea typeface="Meiryo" pitchFamily="34" charset="-122"/>
+                <a:cs typeface="Meiryo" pitchFamily="34" charset="-120"/>
+              </a:rPr>
+              <a:t>箱が積み重なっていても大丈夫か</a:t>
+            </a:r>
+            <a:endParaRPr lang="en-US" sz="1500" dirty="0"/>
+          </a:p>
+        </p:txBody>
+      </p:sp>
+      <p:sp>
+        <p:nvSpPr>
+          <p:cNvPr id="13" name="Text 8"/>
+          <p:cNvSpPr txBox="1"/>
+          <p:nvPr/>
+        </p:nvSpPr>
+        <p:spPr>
+          <a:xfrm>
+            <a:off x="6492240" y="4389120"/>
+            <a:ext cx="4937760" cy="502920"/>
+          </a:xfrm>
+          <a:prstGeom prst="rect">
+            <a:avLst/>
+          </a:prstGeom>
+          <a:noFill/>
+          <a:ln/>
+        </p:spPr>
+        <p:txBody>
+          <a:bodyPr wrap="square" lIns="0" tIns="0" rIns="0" bIns="0" rtlCol="0" anchor="t"/>
+          <a:lstStyle/>
+          <a:p>
+            <a:pPr indent="0" marL="0">
+              <a:spcAft>
+                <a:spcPts val="400"/>
+              </a:spcAft>
+              <a:buNone/>
+            </a:pPr>
+            <a:r>
+              <a:rPr lang="en-US" sz="1050" dirty="0">
+                <a:solidFill>
+                  <a:srgbClr val="1F2A37"/>
+                </a:solidFill>
+                <a:latin typeface="Meiryo" pitchFamily="34" charset="0"/>
+                <a:ea typeface="Meiryo" pitchFamily="34" charset="-122"/>
+                <a:cs typeface="Meiryo" pitchFamily="34" charset="-120"/>
+              </a:rPr>
+              <a:t>「エッジに囲まれた、画面の縁に触れない最大の低勾配領域」を一番上の箱の内側として検出し、射影変換で正面視に補正。登録は 1 箱で行えばよい。合成画像では補正なし 0/30 → 補正後 29/30 で部品と穴が正しく取れた。</a:t>
+            </a:r>
+            <a:endParaRPr lang="en-US" sz="1050" dirty="0"/>
+          </a:p>
+        </p:txBody>
+      </p:sp>
+      <p:sp>
+        <p:nvSpPr>
+          <p:cNvPr id="14" name="Shape 9"/>
+          <p:cNvSpPr/>
+          <p:nvPr/>
+        </p:nvSpPr>
+        <p:spPr>
+          <a:xfrm>
+            <a:off x="6309360" y="5120640"/>
+            <a:ext cx="5303520" cy="1143000"/>
+          </a:xfrm>
+          <a:prstGeom prst="roundRect">
+            <a:avLst>
+              <a:gd name="adj" fmla="val 6400"/>
+            </a:avLst>
+          </a:prstGeom>
+          <a:solidFill>
+            <a:srgbClr val="EEF2F6"/>
+          </a:solidFill>
+          <a:ln w="12700">
+            <a:solidFill>
+              <a:srgbClr val="EEF2F6"/>
+            </a:solidFill>
+            <a:prstDash val="solid"/>
+          </a:ln>
+        </p:spPr>
+      </p:sp>
+      <p:sp>
+        <p:nvSpPr>
+          <p:cNvPr id="15" name="Text 10"/>
+          <p:cNvSpPr txBox="1"/>
+          <p:nvPr/>
+        </p:nvSpPr>
+        <p:spPr>
+          <a:xfrm>
+            <a:off x="6492240" y="5257800"/>
             <a:ext cx="4937760" cy="365760"/>
           </a:xfrm>
           <a:prstGeom prst="rect">
@@ -4495,14 +4603,14 @@
       </p:sp>
       <p:sp>
         <p:nvSpPr>
-          <p:cNvPr id="13" name="Text 8"/>
+          <p:cNvPr id="16" name="Text 11"/>
           <p:cNvSpPr txBox="1"/>
           <p:nvPr/>
         </p:nvSpPr>
         <p:spPr>
           <a:xfrm>
-            <a:off x="6492240" y="4389120"/>
-            <a:ext cx="4937760" cy="1691640"/>
+            <a:off x="6492240" y="5669280"/>
+            <a:ext cx="4937760" cy="457200"/>
           </a:xfrm>
           <a:prstGeom prst="rect">
             <a:avLst/>
@@ -4521,7 +4629,7 @@
               <a:buNone/>
             </a:pPr>
             <a:r>
-              <a:rPr lang="en-US" sz="1100" dirty="0">
+              <a:rPr lang="en-US" sz="1050" dirty="0">
                 <a:solidFill>
                   <a:srgbClr val="1F2A37"/>
                 </a:solidFill>
@@ -4529,75 +4637,15 @@
                 <a:ea typeface="Meiryo" pitchFamily="34" charset="-122"/>
                 <a:cs typeface="Meiryo" pitchFamily="34" charset="-120"/>
               </a:rPr>
-              <a:t>・正規化画像上の穴中心と等価半径を点集合として比較</a:t>
+              <a:t>正規化画像上の穴中心と等価半径を点集合として比較。平均オフセットで 1 回補正 → 許容 5% 以内で対応付け。スコア = F1 的一致率 × 距離減衰。金属は映り込みで局所特徴が不安定なため Holes と Shape を必須(gate)に。</a:t>
             </a:r>
-            <a:endParaRPr lang="en-US" sz="1100" dirty="0"/>
-          </a:p>
-          <a:p>
-            <a:pPr indent="0" marL="0">
-              <a:spcAft>
-                <a:spcPts val="400"/>
-              </a:spcAft>
-              <a:buNone/>
-            </a:pPr>
-            <a:r>
-              <a:rPr lang="en-US" sz="1100" dirty="0">
-                <a:solidFill>
-                  <a:srgbClr val="1F2A37"/>
-                </a:solidFill>
-                <a:latin typeface="Meiryo" pitchFamily="34" charset="0"/>
-                <a:ea typeface="Meiryo" pitchFamily="34" charset="-122"/>
-                <a:cs typeface="Meiryo" pitchFamily="34" charset="-120"/>
-              </a:rPr>
-              <a:t>・最近傍対応から平均オフセットを推定して 1 回補正 → 許容 5% 以内で再対応</a:t>
-            </a:r>
-            <a:endParaRPr lang="en-US" sz="1100" dirty="0"/>
-          </a:p>
-          <a:p>
-            <a:pPr indent="0" marL="0">
-              <a:spcAft>
-                <a:spcPts val="400"/>
-              </a:spcAft>
-              <a:buNone/>
-            </a:pPr>
-            <a:r>
-              <a:rPr lang="en-US" sz="1100" dirty="0">
-                <a:solidFill>
-                  <a:srgbClr val="1F2A37"/>
-                </a:solidFill>
-                <a:latin typeface="Meiryo" pitchFamily="34" charset="0"/>
-                <a:ea typeface="Meiryo" pitchFamily="34" charset="-122"/>
-                <a:cs typeface="Meiryo" pitchFamily="34" charset="-120"/>
-              </a:rPr>
-              <a:t>・スコア = F1 的な一致率 × 距離減衰。穴が両方に無い製品では評価対象から外す</a:t>
-            </a:r>
-            <a:endParaRPr lang="en-US" sz="1100" dirty="0"/>
-          </a:p>
-          <a:p>
-            <a:pPr indent="0" marL="0">
-              <a:spcAft>
-                <a:spcPts val="400"/>
-              </a:spcAft>
-              <a:buNone/>
-            </a:pPr>
-            <a:r>
-              <a:rPr lang="en-US" sz="1100" dirty="0">
-                <a:solidFill>
-                  <a:srgbClr val="1F2A37"/>
-                </a:solidFill>
-                <a:latin typeface="Meiryo" pitchFamily="34" charset="0"/>
-                <a:ea typeface="Meiryo" pitchFamily="34" charset="-122"/>
-                <a:cs typeface="Meiryo" pitchFamily="34" charset="-120"/>
-              </a:rPr>
-              <a:t>・金属は映り込みで局所特徴が不安定なため、Holes と Shape を必須(gate)に置く構成を推奨</a:t>
-            </a:r>
-            <a:endParaRPr lang="en-US" sz="1100" dirty="0"/>
+            <a:endParaRPr lang="en-US" sz="1050" dirty="0"/>
           </a:p>
         </p:txBody>
       </p:sp>
       <p:sp>
         <p:nvSpPr>
-          <p:cNvPr id="14" name="Text 9"/>
+          <p:cNvPr id="17" name="Text 12"/>
           <p:cNvSpPr txBox="1"/>
           <p:nvPr/>
         </p:nvSpPr>
@@ -10874,7 +10922,7 @@
                 <a:ea typeface="Meiryo" pitchFamily="34" charset="-122"/>
                 <a:cs typeface="Meiryo" pitchFamily="34" charset="-120"/>
               </a:rPr>
-              <a:t>・箱の縁の誤検出。必要なら箱の四隅検出 → パース補正を追加</a:t>
+              <a:t>・実物の箱で内側矩形が検出できるか(縁のコントラスト次第。弱ければ勾配しきい値を調整)</a:t>
             </a:r>
             <a:endParaRPr lang="en-US" sz="1050" dirty="0"/>
           </a:p>
